--- a/tests/benchmark/architectural_slides/case_018_drawing_metrics_hybrid/output.pptx
+++ b/tests/benchmark/architectural_slides/case_018_drawing_metrics_hybrid/output.pptx
@@ -910,7 +910,7 @@
         <p:spPr>
           <a:xfrm>
             <a:off x="640080" y="411480"/>
-            <a:ext cx="7863840" cy="411480"/>
+            <a:ext cx="7863840" cy="601218"/>
           </a:xfrm>
           <a:prstGeom prst="rect">
             <a:avLst/>
@@ -948,8 +948,8 @@
         </p:nvSpPr>
         <p:spPr>
           <a:xfrm>
-            <a:off x="640080" y="899160"/>
-            <a:ext cx="4009949" cy="3256788"/>
+            <a:off x="640080" y="1088898"/>
+            <a:ext cx="4009949" cy="3067050"/>
           </a:xfrm>
           <a:prstGeom prst="rect">
             <a:avLst/>
@@ -973,7 +973,7 @@
         </p:nvSpPr>
         <p:spPr>
           <a:xfrm>
-            <a:off x="777240" y="2344674"/>
+            <a:off x="777240" y="2439543"/>
             <a:ext cx="3735629" cy="365760"/>
           </a:xfrm>
           <a:prstGeom prst="rect">
@@ -1012,8 +1012,8 @@
         </p:nvSpPr>
         <p:spPr>
           <a:xfrm>
-            <a:off x="4802429" y="899160"/>
-            <a:ext cx="1208430" cy="640080"/>
+            <a:off x="4802429" y="1088898"/>
+            <a:ext cx="1208430" cy="772668"/>
           </a:xfrm>
           <a:prstGeom prst="rect">
             <a:avLst/>
@@ -1051,8 +1051,8 @@
         </p:nvSpPr>
         <p:spPr>
           <a:xfrm>
-            <a:off x="6048959" y="899160"/>
-            <a:ext cx="1208430" cy="640080"/>
+            <a:off x="6048959" y="1088898"/>
+            <a:ext cx="1208430" cy="772668"/>
           </a:xfrm>
           <a:prstGeom prst="rect">
             <a:avLst/>
@@ -1090,8 +1090,8 @@
         </p:nvSpPr>
         <p:spPr>
           <a:xfrm>
-            <a:off x="7295490" y="899160"/>
-            <a:ext cx="1208430" cy="640080"/>
+            <a:off x="7295490" y="1088898"/>
+            <a:ext cx="1208430" cy="772668"/>
           </a:xfrm>
           <a:prstGeom prst="rect">
             <a:avLst/>
@@ -1129,8 +1129,8 @@
         </p:nvSpPr>
         <p:spPr>
           <a:xfrm>
-            <a:off x="4802429" y="1615440"/>
-            <a:ext cx="3701491" cy="502920"/>
+            <a:off x="4802429" y="1937766"/>
+            <a:ext cx="3701491" cy="635508"/>
           </a:xfrm>
           <a:prstGeom prst="rect">
             <a:avLst/>
@@ -1168,8 +1168,8 @@
         </p:nvSpPr>
         <p:spPr>
           <a:xfrm>
-            <a:off x="4802429" y="2156460"/>
-            <a:ext cx="3701491" cy="1999488"/>
+            <a:off x="4802429" y="2611374"/>
+            <a:ext cx="3701491" cy="841248"/>
           </a:xfrm>
           <a:prstGeom prst="rect">
             <a:avLst/>

--- a/tests/benchmark/architectural_slides/case_018_drawing_metrics_hybrid/output.pptx
+++ b/tests/benchmark/architectural_slides/case_018_drawing_metrics_hybrid/output.pptx
@@ -940,12 +940,19 @@
           </a:p>
         </p:txBody>
       </p:sp>
-      <p:sp>
-        <p:nvSpPr>
-          <p:cNvPr id="3" name="Shape 1"/>
-          <p:cNvSpPr/>
+      <p:pic>
+        <p:nvPicPr>
+          <p:cNvPr id="3" name="Image 0" descr="C:\Users\navib\Desktop\development\Archium-Agent\tests\benchmark\architectural_slides\case_018_drawing_metrics_hybrid\assets\c0180001-0001-4001-8001-000000000001.png">    </p:cNvPr>
+          <p:cNvPicPr>
+            <a:picLocks noChangeAspect="1"/>
+          </p:cNvPicPr>
           <p:nvPr/>
-        </p:nvSpPr>
+        </p:nvPicPr>
+        <p:blipFill>
+          <a:blip r:embed="rId1"/>
+          <a:srcRect l="0" r="0" t="0" b="0"/>
+          <a:stretch/>
+        </p:blipFill>
         <p:spPr>
           <a:xfrm>
             <a:off x="640080" y="1088898"/>
@@ -954,59 +961,11 @@
           <a:prstGeom prst="rect">
             <a:avLst/>
           </a:prstGeom>
-          <a:solidFill>
-            <a:srgbClr val="FFFFFF"/>
-          </a:solidFill>
-          <a:ln w="19050">
-            <a:solidFill>
-              <a:srgbClr val="C47B2B"/>
-            </a:solidFill>
-            <a:prstDash val="dash"/>
-          </a:ln>
         </p:spPr>
-      </p:sp>
+      </p:pic>
       <p:sp>
         <p:nvSpPr>
-          <p:cNvPr id="4" name="Text 2"/>
-          <p:cNvSpPr/>
-          <p:nvPr/>
-        </p:nvSpPr>
-        <p:spPr>
-          <a:xfrm>
-            <a:off x="777240" y="2439543"/>
-            <a:ext cx="3735629" cy="365760"/>
-          </a:xfrm>
-          <a:prstGeom prst="rect">
-            <a:avLst/>
-          </a:prstGeom>
-          <a:noFill/>
-          <a:ln/>
-        </p:spPr>
-        <p:txBody>
-          <a:bodyPr wrap="square" rtlCol="0" anchor="ctr"/>
-          <a:lstStyle/>
-          <a:p>
-            <a:pPr algn="ctr" indent="0" marL="0">
-              <a:buNone/>
-            </a:pPr>
-            <a:r>
-              <a:rPr lang="en-US" sz="1200" dirty="0">
-                <a:solidFill>
-                  <a:srgbClr val="777777"/>
-                </a:solidFill>
-                <a:latin typeface="Microsoft YaHei" pitchFamily="34" charset="0"/>
-                <a:ea typeface="Microsoft YaHei" pitchFamily="34" charset="-122"/>
-                <a:cs typeface="Microsoft YaHei" pitchFamily="34" charset="-120"/>
-              </a:rPr>
-              <a:t>技术图纸缺失</a:t>
-            </a:r>
-            <a:endParaRPr lang="en-US" sz="1200" dirty="0"/>
-          </a:p>
-        </p:txBody>
-      </p:sp>
-      <p:sp>
-        <p:nvSpPr>
-          <p:cNvPr id="5" name="Text 3"/>
+          <p:cNvPr id="4" name="Text 1"/>
           <p:cNvSpPr/>
           <p:nvPr/>
         </p:nvSpPr>
@@ -1045,7 +1004,7 @@
       </p:sp>
       <p:sp>
         <p:nvSpPr>
-          <p:cNvPr id="6" name="Text 4"/>
+          <p:cNvPr id="5" name="Text 2"/>
           <p:cNvSpPr/>
           <p:nvPr/>
         </p:nvSpPr>
@@ -1084,7 +1043,7 @@
       </p:sp>
       <p:sp>
         <p:nvSpPr>
-          <p:cNvPr id="7" name="Text 5"/>
+          <p:cNvPr id="6" name="Text 3"/>
           <p:cNvSpPr/>
           <p:nvPr/>
         </p:nvSpPr>
@@ -1123,7 +1082,7 @@
       </p:sp>
       <p:sp>
         <p:nvSpPr>
-          <p:cNvPr id="8" name="Text 6"/>
+          <p:cNvPr id="7" name="Text 4"/>
           <p:cNvSpPr/>
           <p:nvPr/>
         </p:nvSpPr>
@@ -1162,7 +1121,7 @@
       </p:sp>
       <p:sp>
         <p:nvSpPr>
-          <p:cNvPr id="9" name="Text 7"/>
+          <p:cNvPr id="8" name="Text 5"/>
           <p:cNvSpPr/>
           <p:nvPr/>
         </p:nvSpPr>
@@ -1235,7 +1194,7 @@
       </p:sp>
       <p:sp>
         <p:nvSpPr>
-          <p:cNvPr id="10" name="Text 8"/>
+          <p:cNvPr id="9" name="Text 6"/>
           <p:cNvSpPr/>
           <p:nvPr/>
         </p:nvSpPr>

--- a/tests/benchmark/architectural_slides/case_018_drawing_metrics_hybrid/output.pptx
+++ b/tests/benchmark/architectural_slides/case_018_drawing_metrics_hybrid/output.pptx
@@ -965,7 +965,32 @@
       </p:pic>
       <p:sp>
         <p:nvSpPr>
-          <p:cNvPr id="4" name="Text 1"/>
+          <p:cNvPr id="4" name="Shape 1"/>
+          <p:cNvSpPr/>
+          <p:nvPr/>
+        </p:nvSpPr>
+        <p:spPr>
+          <a:xfrm>
+            <a:off x="4802429" y="1088898"/>
+            <a:ext cx="1208430" cy="772668"/>
+          </a:xfrm>
+          <a:prstGeom prst="rect">
+            <a:avLst/>
+          </a:prstGeom>
+          <a:solidFill>
+            <a:srgbClr val="FFFFFF"/>
+          </a:solidFill>
+          <a:ln w="12700">
+            <a:solidFill>
+              <a:srgbClr val="D9D5CF"/>
+            </a:solidFill>
+            <a:prstDash val="solid"/>
+          </a:ln>
+        </p:spPr>
+      </p:sp>
+      <p:sp>
+        <p:nvSpPr>
+          <p:cNvPr id="5" name="Text 2"/>
           <p:cNvSpPr/>
           <p:nvPr/>
         </p:nvSpPr>
@@ -1004,7 +1029,32 @@
       </p:sp>
       <p:sp>
         <p:nvSpPr>
-          <p:cNvPr id="5" name="Text 2"/>
+          <p:cNvPr id="6" name="Shape 3"/>
+          <p:cNvSpPr/>
+          <p:nvPr/>
+        </p:nvSpPr>
+        <p:spPr>
+          <a:xfrm>
+            <a:off x="6048959" y="1088898"/>
+            <a:ext cx="1208430" cy="772668"/>
+          </a:xfrm>
+          <a:prstGeom prst="rect">
+            <a:avLst/>
+          </a:prstGeom>
+          <a:solidFill>
+            <a:srgbClr val="FFFFFF"/>
+          </a:solidFill>
+          <a:ln w="12700">
+            <a:solidFill>
+              <a:srgbClr val="D9D5CF"/>
+            </a:solidFill>
+            <a:prstDash val="solid"/>
+          </a:ln>
+        </p:spPr>
+      </p:sp>
+      <p:sp>
+        <p:nvSpPr>
+          <p:cNvPr id="7" name="Text 4"/>
           <p:cNvSpPr/>
           <p:nvPr/>
         </p:nvSpPr>
@@ -1043,7 +1093,32 @@
       </p:sp>
       <p:sp>
         <p:nvSpPr>
-          <p:cNvPr id="6" name="Text 3"/>
+          <p:cNvPr id="8" name="Shape 5"/>
+          <p:cNvSpPr/>
+          <p:nvPr/>
+        </p:nvSpPr>
+        <p:spPr>
+          <a:xfrm>
+            <a:off x="7295490" y="1088898"/>
+            <a:ext cx="1208430" cy="772668"/>
+          </a:xfrm>
+          <a:prstGeom prst="rect">
+            <a:avLst/>
+          </a:prstGeom>
+          <a:solidFill>
+            <a:srgbClr val="FFFFFF"/>
+          </a:solidFill>
+          <a:ln w="12700">
+            <a:solidFill>
+              <a:srgbClr val="D9D5CF"/>
+            </a:solidFill>
+            <a:prstDash val="solid"/>
+          </a:ln>
+        </p:spPr>
+      </p:sp>
+      <p:sp>
+        <p:nvSpPr>
+          <p:cNvPr id="9" name="Text 6"/>
           <p:cNvSpPr/>
           <p:nvPr/>
         </p:nvSpPr>
@@ -1082,7 +1157,7 @@
       </p:sp>
       <p:sp>
         <p:nvSpPr>
-          <p:cNvPr id="7" name="Text 4"/>
+          <p:cNvPr id="10" name="Text 7"/>
           <p:cNvSpPr/>
           <p:nvPr/>
         </p:nvSpPr>
@@ -1121,7 +1196,7 @@
       </p:sp>
       <p:sp>
         <p:nvSpPr>
-          <p:cNvPr id="8" name="Text 5"/>
+          <p:cNvPr id="11" name="Text 8"/>
           <p:cNvSpPr/>
           <p:nvPr/>
         </p:nvSpPr>
@@ -1194,7 +1269,7 @@
       </p:sp>
       <p:sp>
         <p:nvSpPr>
-          <p:cNvPr id="9" name="Text 6"/>
+          <p:cNvPr id="12" name="Text 9"/>
           <p:cNvSpPr/>
           <p:nvPr/>
         </p:nvSpPr>

--- a/tests/benchmark/architectural_slides/case_018_drawing_metrics_hybrid/output.pptx
+++ b/tests/benchmark/architectural_slides/case_018_drawing_metrics_hybrid/output.pptx
@@ -910,7 +910,7 @@
         <p:spPr>
           <a:xfrm>
             <a:off x="640080" y="411480"/>
-            <a:ext cx="7863840" cy="601218"/>
+            <a:ext cx="7863840" cy="621792"/>
           </a:xfrm>
           <a:prstGeom prst="rect">
             <a:avLst/>
@@ -940,9 +940,34 @@
           </a:p>
         </p:txBody>
       </p:sp>
+      <p:sp>
+        <p:nvSpPr>
+          <p:cNvPr id="3" name="Shape 1"/>
+          <p:cNvSpPr/>
+          <p:nvPr/>
+        </p:nvSpPr>
+        <p:spPr>
+          <a:xfrm>
+            <a:off x="4493971" y="1109472"/>
+            <a:ext cx="4009949" cy="3046476"/>
+          </a:xfrm>
+          <a:prstGeom prst="rect">
+            <a:avLst/>
+          </a:prstGeom>
+          <a:solidFill>
+            <a:srgbClr val="F2F3F1"/>
+          </a:solidFill>
+          <a:ln w="12700">
+            <a:solidFill>
+              <a:srgbClr val="D9D5CF"/>
+            </a:solidFill>
+            <a:prstDash val="solid"/>
+          </a:ln>
+        </p:spPr>
+      </p:sp>
       <p:pic>
         <p:nvPicPr>
-          <p:cNvPr id="3" name="Image 0" descr="C:\Users\navib\Desktop\development\Archium-Agent\tests\benchmark\architectural_slides\case_018_drawing_metrics_hybrid\assets\c0180001-0001-4001-8001-000000000001.png">    </p:cNvPr>
+          <p:cNvPr id="4" name="Image 0" descr="C:\Users\navib\Desktop\development\Archium-Agent\tests\benchmark\architectural_slides\case_018_drawing_metrics_hybrid\assets\c0180001-0001-4001-8001-000000000001.png">    </p:cNvPr>
           <p:cNvPicPr>
             <a:picLocks noChangeAspect="1"/>
           </p:cNvPicPr>
@@ -955,8 +980,8 @@
         </p:blipFill>
         <p:spPr>
           <a:xfrm>
-            <a:off x="640080" y="1088898"/>
-            <a:ext cx="4009949" cy="3067050"/>
+            <a:off x="640080" y="1109472"/>
+            <a:ext cx="3701491" cy="3046476"/>
           </a:xfrm>
           <a:prstGeom prst="rect">
             <a:avLst/>
@@ -965,14 +990,14 @@
       </p:pic>
       <p:sp>
         <p:nvSpPr>
-          <p:cNvPr id="4" name="Shape 1"/>
+          <p:cNvPr id="5" name="Shape 2"/>
           <p:cNvSpPr/>
           <p:nvPr/>
         </p:nvSpPr>
         <p:spPr>
           <a:xfrm>
-            <a:off x="4802429" y="1088898"/>
-            <a:ext cx="1208430" cy="772668"/>
+            <a:off x="4493971" y="1109472"/>
+            <a:ext cx="1311250" cy="772668"/>
           </a:xfrm>
           <a:prstGeom prst="rect">
             <a:avLst/>
@@ -990,14 +1015,14 @@
       </p:sp>
       <p:sp>
         <p:nvSpPr>
-          <p:cNvPr id="5" name="Text 2"/>
+          <p:cNvPr id="6" name="Text 3"/>
           <p:cNvSpPr/>
           <p:nvPr/>
         </p:nvSpPr>
         <p:spPr>
           <a:xfrm>
-            <a:off x="4802429" y="1088898"/>
-            <a:ext cx="1208430" cy="772668"/>
+            <a:off x="4493971" y="1109472"/>
+            <a:ext cx="1311250" cy="772668"/>
           </a:xfrm>
           <a:prstGeom prst="rect">
             <a:avLst/>
@@ -1029,14 +1054,14 @@
       </p:sp>
       <p:sp>
         <p:nvSpPr>
-          <p:cNvPr id="6" name="Shape 3"/>
+          <p:cNvPr id="7" name="Shape 4"/>
           <p:cNvSpPr/>
           <p:nvPr/>
         </p:nvSpPr>
         <p:spPr>
           <a:xfrm>
-            <a:off x="6048959" y="1088898"/>
-            <a:ext cx="1208430" cy="772668"/>
+            <a:off x="5843321" y="1109472"/>
+            <a:ext cx="1311250" cy="772668"/>
           </a:xfrm>
           <a:prstGeom prst="rect">
             <a:avLst/>
@@ -1054,14 +1079,14 @@
       </p:sp>
       <p:sp>
         <p:nvSpPr>
-          <p:cNvPr id="7" name="Text 4"/>
+          <p:cNvPr id="8" name="Text 5"/>
           <p:cNvSpPr/>
           <p:nvPr/>
         </p:nvSpPr>
         <p:spPr>
           <a:xfrm>
-            <a:off x="6048959" y="1088898"/>
-            <a:ext cx="1208430" cy="772668"/>
+            <a:off x="5843321" y="1109472"/>
+            <a:ext cx="1311250" cy="772668"/>
           </a:xfrm>
           <a:prstGeom prst="rect">
             <a:avLst/>
@@ -1093,14 +1118,14 @@
       </p:sp>
       <p:sp>
         <p:nvSpPr>
-          <p:cNvPr id="8" name="Shape 5"/>
+          <p:cNvPr id="9" name="Shape 6"/>
           <p:cNvSpPr/>
           <p:nvPr/>
         </p:nvSpPr>
         <p:spPr>
           <a:xfrm>
-            <a:off x="7295490" y="1088898"/>
-            <a:ext cx="1208430" cy="772668"/>
+            <a:off x="7192670" y="1109472"/>
+            <a:ext cx="1311250" cy="772668"/>
           </a:xfrm>
           <a:prstGeom prst="rect">
             <a:avLst/>
@@ -1118,14 +1143,14 @@
       </p:sp>
       <p:sp>
         <p:nvSpPr>
-          <p:cNvPr id="9" name="Text 6"/>
+          <p:cNvPr id="10" name="Text 7"/>
           <p:cNvSpPr/>
           <p:nvPr/>
         </p:nvSpPr>
         <p:spPr>
           <a:xfrm>
-            <a:off x="7295490" y="1088898"/>
-            <a:ext cx="1208430" cy="772668"/>
+            <a:off x="7192670" y="1109472"/>
+            <a:ext cx="1311250" cy="772668"/>
           </a:xfrm>
           <a:prstGeom prst="rect">
             <a:avLst/>
@@ -1157,14 +1182,14 @@
       </p:sp>
       <p:sp>
         <p:nvSpPr>
-          <p:cNvPr id="10" name="Text 7"/>
+          <p:cNvPr id="11" name="Text 8"/>
           <p:cNvSpPr/>
           <p:nvPr/>
         </p:nvSpPr>
         <p:spPr>
           <a:xfrm>
-            <a:off x="4802429" y="1937766"/>
-            <a:ext cx="3701491" cy="635508"/>
+            <a:off x="4493971" y="1958340"/>
+            <a:ext cx="4009949" cy="635508"/>
           </a:xfrm>
           <a:prstGeom prst="rect">
             <a:avLst/>
@@ -1196,14 +1221,14 @@
       </p:sp>
       <p:sp>
         <p:nvSpPr>
-          <p:cNvPr id="11" name="Text 8"/>
+          <p:cNvPr id="12" name="Text 9"/>
           <p:cNvSpPr/>
           <p:nvPr/>
         </p:nvSpPr>
         <p:spPr>
           <a:xfrm>
-            <a:off x="4802429" y="2611374"/>
-            <a:ext cx="3701491" cy="841248"/>
+            <a:off x="4493971" y="2631948"/>
+            <a:ext cx="4009949" cy="841248"/>
           </a:xfrm>
           <a:prstGeom prst="rect">
             <a:avLst/>
@@ -1269,7 +1294,7 @@
       </p:sp>
       <p:sp>
         <p:nvSpPr>
-          <p:cNvPr id="12" name="Text 9"/>
+          <p:cNvPr id="13" name="Text 10"/>
           <p:cNvSpPr/>
           <p:nvPr/>
         </p:nvSpPr>

--- a/tests/benchmark/architectural_slides/case_018_drawing_metrics_hybrid/output.pptx
+++ b/tests/benchmark/architectural_slides/case_018_drawing_metrics_hybrid/output.pptx
@@ -910,7 +910,7 @@
         <p:spPr>
           <a:xfrm>
             <a:off x="640080" y="411480"/>
-            <a:ext cx="7863840" cy="621792"/>
+            <a:ext cx="7863840" cy="601218"/>
           </a:xfrm>
           <a:prstGeom prst="rect">
             <a:avLst/>
@@ -948,8 +948,8 @@
         </p:nvSpPr>
         <p:spPr>
           <a:xfrm>
-            <a:off x="4493971" y="1109472"/>
-            <a:ext cx="4009949" cy="3046476"/>
+            <a:off x="4493971" y="1088898"/>
+            <a:ext cx="4009949" cy="3204210"/>
           </a:xfrm>
           <a:prstGeom prst="rect">
             <a:avLst/>
@@ -980,8 +980,8 @@
         </p:blipFill>
         <p:spPr>
           <a:xfrm>
-            <a:off x="640080" y="1109472"/>
-            <a:ext cx="3701491" cy="3046476"/>
+            <a:off x="640080" y="1088898"/>
+            <a:ext cx="3701491" cy="3204210"/>
           </a:xfrm>
           <a:prstGeom prst="rect">
             <a:avLst/>
@@ -996,7 +996,7 @@
         </p:nvSpPr>
         <p:spPr>
           <a:xfrm>
-            <a:off x="4493971" y="1109472"/>
+            <a:off x="4493971" y="1088898"/>
             <a:ext cx="1311250" cy="772668"/>
           </a:xfrm>
           <a:prstGeom prst="rect">
@@ -1021,7 +1021,7 @@
         </p:nvSpPr>
         <p:spPr>
           <a:xfrm>
-            <a:off x="4493971" y="1109472"/>
+            <a:off x="4493971" y="1088898"/>
             <a:ext cx="1311250" cy="772668"/>
           </a:xfrm>
           <a:prstGeom prst="rect">
@@ -1060,7 +1060,7 @@
         </p:nvSpPr>
         <p:spPr>
           <a:xfrm>
-            <a:off x="5843321" y="1109472"/>
+            <a:off x="5843321" y="1088898"/>
             <a:ext cx="1311250" cy="772668"/>
           </a:xfrm>
           <a:prstGeom prst="rect">
@@ -1085,7 +1085,7 @@
         </p:nvSpPr>
         <p:spPr>
           <a:xfrm>
-            <a:off x="5843321" y="1109472"/>
+            <a:off x="5843321" y="1088898"/>
             <a:ext cx="1311250" cy="772668"/>
           </a:xfrm>
           <a:prstGeom prst="rect">
@@ -1124,7 +1124,7 @@
         </p:nvSpPr>
         <p:spPr>
           <a:xfrm>
-            <a:off x="7192670" y="1109472"/>
+            <a:off x="7192670" y="1088898"/>
             <a:ext cx="1311250" cy="772668"/>
           </a:xfrm>
           <a:prstGeom prst="rect">
@@ -1149,7 +1149,7 @@
         </p:nvSpPr>
         <p:spPr>
           <a:xfrm>
-            <a:off x="7192670" y="1109472"/>
+            <a:off x="7192670" y="1088898"/>
             <a:ext cx="1311250" cy="772668"/>
           </a:xfrm>
           <a:prstGeom prst="rect">
@@ -1188,7 +1188,7 @@
         </p:nvSpPr>
         <p:spPr>
           <a:xfrm>
-            <a:off x="4493971" y="1958340"/>
+            <a:off x="4493971" y="1937766"/>
             <a:ext cx="4009949" cy="635508"/>
           </a:xfrm>
           <a:prstGeom prst="rect">
@@ -1227,7 +1227,7 @@
         </p:nvSpPr>
         <p:spPr>
           <a:xfrm>
-            <a:off x="4493971" y="2631948"/>
+            <a:off x="4493971" y="2611374"/>
             <a:ext cx="4009949" cy="841248"/>
           </a:xfrm>
           <a:prstGeom prst="rect">
